--- a/templates/GradScan_Layout_Starter.pptx
+++ b/templates/GradScan_Layout_Starter.pptx
@@ -420,7 +420,7 @@
           <a:lstStyle/>
           <a:p>
             <a:r>
-              <a:rPr lang="en-US" sz="2000" b="1">
+              <a:rPr lang="en-US" sz="1800" b="1">
                 <a:solidFill>
                   <a:srgbClr val="1E293B"/>
                 </a:solidFill>
@@ -429,7 +429,7 @@
               <a:t>1. Slide 1 is your layout template: </a:t>
             </a:r>
             <a:r>
-              <a:rPr lang="en-US" sz="2000">
+              <a:rPr lang="en-US" sz="1800">
                 <a:solidFill>
                   <a:srgbClr val="334155"/>
                 </a:solidFill>
@@ -443,22 +443,22 @@
           </a:p>
           <a:p>
             <a:r>
-              <a:rPr lang="en-US" sz="2000" b="1">
+              <a:rPr lang="en-US" sz="1800" b="1">
                 <a:solidFill>
                   <a:srgbClr val="1E293B"/>
                 </a:solidFill>
                 <a:latin typeface="Segoe UI"/>
               </a:rPr>
-              <a:t>2. Keep the placeholder tokens intact: </a:t>
-            </a:r>
-            <a:r>
-              <a:rPr lang="en-US" sz="2000">
+              <a:t>2. Keep the placeholder tokens: </a:t>
+            </a:r>
+            <a:r>
+              <a:rPr lang="en-US" sz="1800">
                 <a:solidFill>
                   <a:srgbClr val="334155"/>
                 </a:solidFill>
                 <a:latin typeface="Segoe UI"/>
               </a:rPr>
-              <a:t>GradScan detects {{name}}, {{course}}, {{student_id}}, {{honors}}, {{year}}, {{header}}, and the shape named "photo". If you don't need a field, simply delete it from Slide 1.</a:t>
+              <a:t>GradScan detects {{name}}, {{course}}, {{student_id}}, {{honors}}, {{year}}, {{header}}, and the shape named "photo". Delete a field you don't need. Text typed next to {{header}} becomes the header.</a:t>
             </a:r>
           </a:p>
           <a:p>
@@ -466,7 +466,7 @@
           </a:p>
           <a:p>
             <a:r>
-              <a:rPr lang="en-US" sz="2000" b="1">
+              <a:rPr lang="en-US" sz="1800" b="1">
                 <a:solidFill>
                   <a:srgbClr val="1E293B"/>
                 </a:solidFill>
@@ -475,7 +475,7 @@
               <a:t>3. Supported Windows fonts: </a:t>
             </a:r>
             <a:r>
-              <a:rPr lang="en-US" sz="2000">
+              <a:rPr lang="en-US" sz="1800">
                 <a:solidFill>
                   <a:srgbClr val="334155"/>
                 </a:solidFill>
@@ -489,22 +489,22 @@
           </a:p>
           <a:p>
             <a:r>
-              <a:rPr lang="en-US" sz="2000" b="1">
+              <a:rPr lang="en-US" sz="1800" b="1">
                 <a:solidFill>
                   <a:srgbClr val="1E293B"/>
                 </a:solidFill>
                 <a:latin typeface="Segoe UI"/>
               </a:rPr>
-              <a:t>4. Export background image: </a:t>
-            </a:r>
-            <a:r>
-              <a:rPr lang="en-US" sz="2000">
+              <a:t>4. Background picture: </a:t>
+            </a:r>
+            <a:r>
+              <a:rPr lang="en-US" sz="1800">
                 <a:solidFill>
                   <a:srgbClr val="334155"/>
                 </a:solidFill>
                 <a:latin typeface="Segoe UI"/>
               </a:rPr>
-              <a:t>Once your graphics and background artwork are designed, save Slide 1 as PNG or JPG (File &gt; Export &gt; Change File Type &gt; PNG / JPEG).</a:t>
+              <a:t>Right-click Slide 1 &gt; Format Background &gt; Picture or texture fill &gt; Insert, and choose your design (e.g. a PNG from Canva). Or insert one picture covering the whole slide and Send to Back. Other shapes on the slide are not included.</a:t>
             </a:r>
           </a:p>
           <a:p>
@@ -512,7 +512,7 @@
           </a:p>
           <a:p>
             <a:r>
-              <a:rPr lang="en-US" sz="2000" b="1">
+              <a:rPr lang="en-US" sz="1800" b="1">
                 <a:solidFill>
                   <a:srgbClr val="1E293B"/>
                 </a:solidFill>
@@ -521,13 +521,13 @@
               <a:t>5. Import to GradScan: </a:t>
             </a:r>
             <a:r>
-              <a:rPr lang="en-US" sz="2000">
+              <a:rPr lang="en-US" sz="1800">
                 <a:solidFill>
                   <a:srgbClr val="334155"/>
                 </a:solidFill>
                 <a:latin typeface="Segoe UI"/>
               </a:rPr>
-              <a:t>Go to Layout Management, click "Import from PowerPoint", and upload this .pptx file plus the exported background image!</a:t>
+              <a:t>In Layout Management, click "Import from PowerPoint" and upload this .pptx. Check the preview, then click Save Layout.</a:t>
             </a:r>
           </a:p>
         </p:txBody>
